--- a/analyses-project/guidance/W3_Writing_the_introduction.pptx
+++ b/analyses-project/guidance/W3_Writing_the_introduction.pptx
@@ -7225,29 +7225,7 @@
                 <a:ea typeface="Calibri" pitchFamily="34" charset="-122"/>
                 <a:cs typeface="Calibri" pitchFamily="34" charset="-120"/>
               </a:rPr>
-              <a:t>. Analysis slides: </a:t>
-            </a:r>
-            <a:r>
-              <a:rPr lang="en-US" sz="1350" b="1" dirty="0">
-                <a:solidFill>
-                  <a:srgbClr val="222B36"/>
-                </a:solidFill>
-                <a:latin typeface="Calibri" pitchFamily="34" charset="0"/>
-                <a:ea typeface="Calibri" pitchFamily="34" charset="-122"/>
-                <a:cs typeface="Calibri" pitchFamily="34" charset="-120"/>
-              </a:rPr>
-              <a:t>04</a:t>
-            </a:r>
-            <a:r>
-              <a:rPr lang="en-US" sz="1350" dirty="0">
-                <a:solidFill>
-                  <a:srgbClr val="222B36"/>
-                </a:solidFill>
-                <a:latin typeface="Calibri" pitchFamily="34" charset="0"/>
-                <a:ea typeface="Calibri" pitchFamily="34" charset="-122"/>
-                <a:cs typeface="Calibri" pitchFamily="34" charset="-120"/>
-              </a:rPr>
-              <a:t>.</a:t>
+              <a:t> (thresholds; composites).</a:t>
             </a:r>
             <a:endParaRPr lang="en-US" sz="1350" dirty="0"/>
           </a:p>
